--- a/public/videos/repositories/local-alert-radar/local-alert-radar-tech-preview.pptx
+++ b/public/videos/repositories/local-alert-radar/local-alert-radar-tech-preview.pptx
@@ -134,7 +134,7 @@
           <p:cNvPr id="2" name="タイトル 1">
             <a:extLst>
               <a:ext uri="{FF2B5EF4-FFF2-40B4-BE49-F238E27FC236}">
-                <a16:creationId xmlns:a16="http://schemas.microsoft.com/office/drawing/2014/main" id="{FCC7EA09-D008-4455-804B-52A4E657873C}"/>
+                <a16:creationId xmlns:a16="http://schemas.microsoft.com/office/drawing/2014/main" id="{2A0FC9AA-1390-D251-782C-FAF2F7ED2E0C}"/>
               </a:ext>
             </a:extLst>
           </p:cNvPr>
@@ -171,7 +171,7 @@
           <p:cNvPr id="3" name="字幕 2">
             <a:extLst>
               <a:ext uri="{FF2B5EF4-FFF2-40B4-BE49-F238E27FC236}">
-                <a16:creationId xmlns:a16="http://schemas.microsoft.com/office/drawing/2014/main" id="{A880B75E-19B3-2D11-2503-624339DE729D}"/>
+                <a16:creationId xmlns:a16="http://schemas.microsoft.com/office/drawing/2014/main" id="{1CECD2E4-ADD9-293C-A6E1-3434AB69B66C}"/>
               </a:ext>
             </a:extLst>
           </p:cNvPr>
@@ -241,7 +241,7 @@
           <p:cNvPr id="4" name="日付プレースホルダー 3">
             <a:extLst>
               <a:ext uri="{FF2B5EF4-FFF2-40B4-BE49-F238E27FC236}">
-                <a16:creationId xmlns:a16="http://schemas.microsoft.com/office/drawing/2014/main" id="{696FE702-F3E5-E5AA-AC5A-73E59CEFC323}"/>
+                <a16:creationId xmlns:a16="http://schemas.microsoft.com/office/drawing/2014/main" id="{5180E4BA-A832-7B70-2351-307897DDAD7B}"/>
               </a:ext>
             </a:extLst>
           </p:cNvPr>
@@ -257,7 +257,7 @@
           <a:bodyPr/>
           <a:lstStyle/>
           <a:p>
-            <a:fld id="{2EC9E279-55A6-4183-81F5-D795B217ABB2}" type="datetimeFigureOut">
+            <a:fld id="{4679A685-9978-4C70-A0F7-7B7CB4B230CA}" type="datetimeFigureOut">
               <a:rPr kumimoji="1" lang="ja-JP" altLang="en-US" smtClean="0"/>
               <a:t>2026/7/30</a:t>
             </a:fld>
@@ -270,7 +270,7 @@
           <p:cNvPr id="5" name="フッター プレースホルダー 4">
             <a:extLst>
               <a:ext uri="{FF2B5EF4-FFF2-40B4-BE49-F238E27FC236}">
-                <a16:creationId xmlns:a16="http://schemas.microsoft.com/office/drawing/2014/main" id="{EF7C19AB-596B-2E3A-3E00-F18E49606D01}"/>
+                <a16:creationId xmlns:a16="http://schemas.microsoft.com/office/drawing/2014/main" id="{5FD9271C-B8D3-E9A9-5557-4CEEB7E17230}"/>
               </a:ext>
             </a:extLst>
           </p:cNvPr>
@@ -295,7 +295,7 @@
           <p:cNvPr id="6" name="スライド番号プレースホルダー 5">
             <a:extLst>
               <a:ext uri="{FF2B5EF4-FFF2-40B4-BE49-F238E27FC236}">
-                <a16:creationId xmlns:a16="http://schemas.microsoft.com/office/drawing/2014/main" id="{EEE911B8-FA93-214F-9991-11393FB749C7}"/>
+                <a16:creationId xmlns:a16="http://schemas.microsoft.com/office/drawing/2014/main" id="{14FD1F96-0B8D-6B5E-D543-47E2BC67F2B4}"/>
               </a:ext>
             </a:extLst>
           </p:cNvPr>
@@ -311,7 +311,7 @@
           <a:bodyPr/>
           <a:lstStyle/>
           <a:p>
-            <a:fld id="{CB2CCBF8-8C76-4712-A1D1-56F42B37C6B7}" type="slidenum">
+            <a:fld id="{5C096DF3-5EEF-4F17-BA3D-0C90A8AA5B28}" type="slidenum">
               <a:rPr kumimoji="1" lang="ja-JP" altLang="en-US" smtClean="0"/>
               <a:t>‹#›</a:t>
             </a:fld>
@@ -322,7 +322,7 @@
     </p:spTree>
     <p:extLst>
       <p:ext uri="{BB962C8B-B14F-4D97-AF65-F5344CB8AC3E}">
-        <p14:creationId xmlns:p14="http://schemas.microsoft.com/office/powerpoint/2010/main" val="1887455515"/>
+        <p14:creationId xmlns:p14="http://schemas.microsoft.com/office/powerpoint/2010/main" val="528305473"/>
       </p:ext>
     </p:extLst>
   </p:cSld>
@@ -354,7 +354,7 @@
           <p:cNvPr id="2" name="タイトル 1">
             <a:extLst>
               <a:ext uri="{FF2B5EF4-FFF2-40B4-BE49-F238E27FC236}">
-                <a16:creationId xmlns:a16="http://schemas.microsoft.com/office/drawing/2014/main" id="{CCD8EA64-C486-A2B1-D1ED-05C09A068186}"/>
+                <a16:creationId xmlns:a16="http://schemas.microsoft.com/office/drawing/2014/main" id="{E3585DF0-DB0F-6CF0-D4C3-D375F93B6B74}"/>
               </a:ext>
             </a:extLst>
           </p:cNvPr>
@@ -382,7 +382,7 @@
           <p:cNvPr id="3" name="縦書きテキスト プレースホルダー 2">
             <a:extLst>
               <a:ext uri="{FF2B5EF4-FFF2-40B4-BE49-F238E27FC236}">
-                <a16:creationId xmlns:a16="http://schemas.microsoft.com/office/drawing/2014/main" id="{F4B55FAB-11D9-EB45-803C-794AFF9B3B72}"/>
+                <a16:creationId xmlns:a16="http://schemas.microsoft.com/office/drawing/2014/main" id="{744E0429-53E5-04EE-BA8B-E431024EAFB9}"/>
               </a:ext>
             </a:extLst>
           </p:cNvPr>
@@ -471,7 +471,7 @@
           <p:cNvPr id="4" name="日付プレースホルダー 3">
             <a:extLst>
               <a:ext uri="{FF2B5EF4-FFF2-40B4-BE49-F238E27FC236}">
-                <a16:creationId xmlns:a16="http://schemas.microsoft.com/office/drawing/2014/main" id="{547AA4BE-8EB4-D061-7B3A-2F15F0A005C9}"/>
+                <a16:creationId xmlns:a16="http://schemas.microsoft.com/office/drawing/2014/main" id="{2F1BAE6F-D81A-7DAC-614A-C0581066F78F}"/>
               </a:ext>
             </a:extLst>
           </p:cNvPr>
@@ -487,7 +487,7 @@
           <a:bodyPr/>
           <a:lstStyle/>
           <a:p>
-            <a:fld id="{2EC9E279-55A6-4183-81F5-D795B217ABB2}" type="datetimeFigureOut">
+            <a:fld id="{4679A685-9978-4C70-A0F7-7B7CB4B230CA}" type="datetimeFigureOut">
               <a:rPr kumimoji="1" lang="ja-JP" altLang="en-US" smtClean="0"/>
               <a:t>2026/7/30</a:t>
             </a:fld>
@@ -500,7 +500,7 @@
           <p:cNvPr id="5" name="フッター プレースホルダー 4">
             <a:extLst>
               <a:ext uri="{FF2B5EF4-FFF2-40B4-BE49-F238E27FC236}">
-                <a16:creationId xmlns:a16="http://schemas.microsoft.com/office/drawing/2014/main" id="{B2607B46-7064-55D0-94F0-DB3019244C24}"/>
+                <a16:creationId xmlns:a16="http://schemas.microsoft.com/office/drawing/2014/main" id="{52E9A545-A1FA-3265-8690-C2997FF61B13}"/>
               </a:ext>
             </a:extLst>
           </p:cNvPr>
@@ -525,7 +525,7 @@
           <p:cNvPr id="6" name="スライド番号プレースホルダー 5">
             <a:extLst>
               <a:ext uri="{FF2B5EF4-FFF2-40B4-BE49-F238E27FC236}">
-                <a16:creationId xmlns:a16="http://schemas.microsoft.com/office/drawing/2014/main" id="{48594F33-34F0-601D-C2CA-94ED09F459F9}"/>
+                <a16:creationId xmlns:a16="http://schemas.microsoft.com/office/drawing/2014/main" id="{18807FFB-D8B2-1537-D367-C8D983F43BBE}"/>
               </a:ext>
             </a:extLst>
           </p:cNvPr>
@@ -541,7 +541,7 @@
           <a:bodyPr/>
           <a:lstStyle/>
           <a:p>
-            <a:fld id="{CB2CCBF8-8C76-4712-A1D1-56F42B37C6B7}" type="slidenum">
+            <a:fld id="{5C096DF3-5EEF-4F17-BA3D-0C90A8AA5B28}" type="slidenum">
               <a:rPr kumimoji="1" lang="ja-JP" altLang="en-US" smtClean="0"/>
               <a:t>‹#›</a:t>
             </a:fld>
@@ -552,7 +552,7 @@
     </p:spTree>
     <p:extLst>
       <p:ext uri="{BB962C8B-B14F-4D97-AF65-F5344CB8AC3E}">
-        <p14:creationId xmlns:p14="http://schemas.microsoft.com/office/powerpoint/2010/main" val="4015117875"/>
+        <p14:creationId xmlns:p14="http://schemas.microsoft.com/office/powerpoint/2010/main" val="3691448313"/>
       </p:ext>
     </p:extLst>
   </p:cSld>
@@ -584,7 +584,7 @@
           <p:cNvPr id="2" name="縦書きタイトル 1">
             <a:extLst>
               <a:ext uri="{FF2B5EF4-FFF2-40B4-BE49-F238E27FC236}">
-                <a16:creationId xmlns:a16="http://schemas.microsoft.com/office/drawing/2014/main" id="{D9DA5286-DC10-32D7-29F4-4F284F059B5C}"/>
+                <a16:creationId xmlns:a16="http://schemas.microsoft.com/office/drawing/2014/main" id="{83F7305D-DE56-6F24-21DB-62032489B81A}"/>
               </a:ext>
             </a:extLst>
           </p:cNvPr>
@@ -617,7 +617,7 @@
           <p:cNvPr id="3" name="縦書きテキスト プレースホルダー 2">
             <a:extLst>
               <a:ext uri="{FF2B5EF4-FFF2-40B4-BE49-F238E27FC236}">
-                <a16:creationId xmlns:a16="http://schemas.microsoft.com/office/drawing/2014/main" id="{400AA9F4-26C4-2A45-FEB4-736037A493D4}"/>
+                <a16:creationId xmlns:a16="http://schemas.microsoft.com/office/drawing/2014/main" id="{0E47B58D-F652-58F7-3274-15093ECBE743}"/>
               </a:ext>
             </a:extLst>
           </p:cNvPr>
@@ -711,7 +711,7 @@
           <p:cNvPr id="4" name="日付プレースホルダー 3">
             <a:extLst>
               <a:ext uri="{FF2B5EF4-FFF2-40B4-BE49-F238E27FC236}">
-                <a16:creationId xmlns:a16="http://schemas.microsoft.com/office/drawing/2014/main" id="{493AD6E9-40C5-2AEC-86DA-531221D7AD57}"/>
+                <a16:creationId xmlns:a16="http://schemas.microsoft.com/office/drawing/2014/main" id="{45716570-5FED-C86B-03FD-E1EB14371210}"/>
               </a:ext>
             </a:extLst>
           </p:cNvPr>
@@ -727,7 +727,7 @@
           <a:bodyPr/>
           <a:lstStyle/>
           <a:p>
-            <a:fld id="{2EC9E279-55A6-4183-81F5-D795B217ABB2}" type="datetimeFigureOut">
+            <a:fld id="{4679A685-9978-4C70-A0F7-7B7CB4B230CA}" type="datetimeFigureOut">
               <a:rPr kumimoji="1" lang="ja-JP" altLang="en-US" smtClean="0"/>
               <a:t>2026/7/30</a:t>
             </a:fld>
@@ -740,7 +740,7 @@
           <p:cNvPr id="5" name="フッター プレースホルダー 4">
             <a:extLst>
               <a:ext uri="{FF2B5EF4-FFF2-40B4-BE49-F238E27FC236}">
-                <a16:creationId xmlns:a16="http://schemas.microsoft.com/office/drawing/2014/main" id="{E700A40A-D1F9-073D-517F-760470278FEE}"/>
+                <a16:creationId xmlns:a16="http://schemas.microsoft.com/office/drawing/2014/main" id="{DCE88D2D-0737-C2BB-18E4-649870B84CA7}"/>
               </a:ext>
             </a:extLst>
           </p:cNvPr>
@@ -765,7 +765,7 @@
           <p:cNvPr id="6" name="スライド番号プレースホルダー 5">
             <a:extLst>
               <a:ext uri="{FF2B5EF4-FFF2-40B4-BE49-F238E27FC236}">
-                <a16:creationId xmlns:a16="http://schemas.microsoft.com/office/drawing/2014/main" id="{C70E3649-F267-5D3C-0F6F-0BDBABB7113D}"/>
+                <a16:creationId xmlns:a16="http://schemas.microsoft.com/office/drawing/2014/main" id="{8C386E15-C227-DD7A-118C-15E5103D3C3E}"/>
               </a:ext>
             </a:extLst>
           </p:cNvPr>
@@ -781,7 +781,7 @@
           <a:bodyPr/>
           <a:lstStyle/>
           <a:p>
-            <a:fld id="{CB2CCBF8-8C76-4712-A1D1-56F42B37C6B7}" type="slidenum">
+            <a:fld id="{5C096DF3-5EEF-4F17-BA3D-0C90A8AA5B28}" type="slidenum">
               <a:rPr kumimoji="1" lang="ja-JP" altLang="en-US" smtClean="0"/>
               <a:t>‹#›</a:t>
             </a:fld>
@@ -792,7 +792,7 @@
     </p:spTree>
     <p:extLst>
       <p:ext uri="{BB962C8B-B14F-4D97-AF65-F5344CB8AC3E}">
-        <p14:creationId xmlns:p14="http://schemas.microsoft.com/office/powerpoint/2010/main" val="1810810765"/>
+        <p14:creationId xmlns:p14="http://schemas.microsoft.com/office/powerpoint/2010/main" val="2217253501"/>
       </p:ext>
     </p:extLst>
   </p:cSld>
@@ -824,7 +824,7 @@
           <p:cNvPr id="2" name="タイトル 1">
             <a:extLst>
               <a:ext uri="{FF2B5EF4-FFF2-40B4-BE49-F238E27FC236}">
-                <a16:creationId xmlns:a16="http://schemas.microsoft.com/office/drawing/2014/main" id="{6F5CA5C6-A1E5-72CE-9D03-6CFBC67088B7}"/>
+                <a16:creationId xmlns:a16="http://schemas.microsoft.com/office/drawing/2014/main" id="{34DC87AA-C1B7-8658-11ED-8C4CBA71D02B}"/>
               </a:ext>
             </a:extLst>
           </p:cNvPr>
@@ -852,7 +852,7 @@
           <p:cNvPr id="3" name="コンテンツ プレースホルダー 2">
             <a:extLst>
               <a:ext uri="{FF2B5EF4-FFF2-40B4-BE49-F238E27FC236}">
-                <a16:creationId xmlns:a16="http://schemas.microsoft.com/office/drawing/2014/main" id="{4EA841EB-82F3-A9AE-B238-796740B069FD}"/>
+                <a16:creationId xmlns:a16="http://schemas.microsoft.com/office/drawing/2014/main" id="{51D4A537-C2FD-6369-D9BB-4609CADC4A02}"/>
               </a:ext>
             </a:extLst>
           </p:cNvPr>
@@ -941,7 +941,7 @@
           <p:cNvPr id="4" name="日付プレースホルダー 3">
             <a:extLst>
               <a:ext uri="{FF2B5EF4-FFF2-40B4-BE49-F238E27FC236}">
-                <a16:creationId xmlns:a16="http://schemas.microsoft.com/office/drawing/2014/main" id="{8DD19D64-0873-13A0-1201-51A6FD63E806}"/>
+                <a16:creationId xmlns:a16="http://schemas.microsoft.com/office/drawing/2014/main" id="{A6857882-60FF-2E20-AA22-427DF2992C06}"/>
               </a:ext>
             </a:extLst>
           </p:cNvPr>
@@ -957,7 +957,7 @@
           <a:bodyPr/>
           <a:lstStyle/>
           <a:p>
-            <a:fld id="{2EC9E279-55A6-4183-81F5-D795B217ABB2}" type="datetimeFigureOut">
+            <a:fld id="{4679A685-9978-4C70-A0F7-7B7CB4B230CA}" type="datetimeFigureOut">
               <a:rPr kumimoji="1" lang="ja-JP" altLang="en-US" smtClean="0"/>
               <a:t>2026/7/30</a:t>
             </a:fld>
@@ -970,7 +970,7 @@
           <p:cNvPr id="5" name="フッター プレースホルダー 4">
             <a:extLst>
               <a:ext uri="{FF2B5EF4-FFF2-40B4-BE49-F238E27FC236}">
-                <a16:creationId xmlns:a16="http://schemas.microsoft.com/office/drawing/2014/main" id="{CFB57728-5FC3-127D-8E6A-A09468157FCD}"/>
+                <a16:creationId xmlns:a16="http://schemas.microsoft.com/office/drawing/2014/main" id="{A6CD089C-0605-5F80-F7E6-66DEEEFA809A}"/>
               </a:ext>
             </a:extLst>
           </p:cNvPr>
@@ -995,7 +995,7 @@
           <p:cNvPr id="6" name="スライド番号プレースホルダー 5">
             <a:extLst>
               <a:ext uri="{FF2B5EF4-FFF2-40B4-BE49-F238E27FC236}">
-                <a16:creationId xmlns:a16="http://schemas.microsoft.com/office/drawing/2014/main" id="{CD54A188-17A7-7162-ED50-66CA19E01A13}"/>
+                <a16:creationId xmlns:a16="http://schemas.microsoft.com/office/drawing/2014/main" id="{DC83A82C-CCDD-11C5-D3BD-33AF54AFBFCC}"/>
               </a:ext>
             </a:extLst>
           </p:cNvPr>
@@ -1011,7 +1011,7 @@
           <a:bodyPr/>
           <a:lstStyle/>
           <a:p>
-            <a:fld id="{CB2CCBF8-8C76-4712-A1D1-56F42B37C6B7}" type="slidenum">
+            <a:fld id="{5C096DF3-5EEF-4F17-BA3D-0C90A8AA5B28}" type="slidenum">
               <a:rPr kumimoji="1" lang="ja-JP" altLang="en-US" smtClean="0"/>
               <a:t>‹#›</a:t>
             </a:fld>
@@ -1022,7 +1022,7 @@
     </p:spTree>
     <p:extLst>
       <p:ext uri="{BB962C8B-B14F-4D97-AF65-F5344CB8AC3E}">
-        <p14:creationId xmlns:p14="http://schemas.microsoft.com/office/powerpoint/2010/main" val="259542534"/>
+        <p14:creationId xmlns:p14="http://schemas.microsoft.com/office/powerpoint/2010/main" val="3576698720"/>
       </p:ext>
     </p:extLst>
   </p:cSld>
@@ -1054,7 +1054,7 @@
           <p:cNvPr id="2" name="タイトル 1">
             <a:extLst>
               <a:ext uri="{FF2B5EF4-FFF2-40B4-BE49-F238E27FC236}">
-                <a16:creationId xmlns:a16="http://schemas.microsoft.com/office/drawing/2014/main" id="{3C48A010-8DA3-BCB1-B9A8-0B189E0DFD32}"/>
+                <a16:creationId xmlns:a16="http://schemas.microsoft.com/office/drawing/2014/main" id="{16051DF0-8753-EC63-BDBD-D12FF1AAE946}"/>
               </a:ext>
             </a:extLst>
           </p:cNvPr>
@@ -1091,7 +1091,7 @@
           <p:cNvPr id="3" name="テキスト プレースホルダー 2">
             <a:extLst>
               <a:ext uri="{FF2B5EF4-FFF2-40B4-BE49-F238E27FC236}">
-                <a16:creationId xmlns:a16="http://schemas.microsoft.com/office/drawing/2014/main" id="{CD89D70E-2F7A-D0F3-2ED3-A7EDB2D964FC}"/>
+                <a16:creationId xmlns:a16="http://schemas.microsoft.com/office/drawing/2014/main" id="{91E22765-F0E1-06B7-20BD-0C6988E99CE2}"/>
               </a:ext>
             </a:extLst>
           </p:cNvPr>
@@ -1216,7 +1216,7 @@
           <p:cNvPr id="4" name="日付プレースホルダー 3">
             <a:extLst>
               <a:ext uri="{FF2B5EF4-FFF2-40B4-BE49-F238E27FC236}">
-                <a16:creationId xmlns:a16="http://schemas.microsoft.com/office/drawing/2014/main" id="{423A799D-4988-DC70-50B6-48756598DDD1}"/>
+                <a16:creationId xmlns:a16="http://schemas.microsoft.com/office/drawing/2014/main" id="{D4FA393D-8909-3487-EDA3-9B3D8106BF87}"/>
               </a:ext>
             </a:extLst>
           </p:cNvPr>
@@ -1232,7 +1232,7 @@
           <a:bodyPr/>
           <a:lstStyle/>
           <a:p>
-            <a:fld id="{2EC9E279-55A6-4183-81F5-D795B217ABB2}" type="datetimeFigureOut">
+            <a:fld id="{4679A685-9978-4C70-A0F7-7B7CB4B230CA}" type="datetimeFigureOut">
               <a:rPr kumimoji="1" lang="ja-JP" altLang="en-US" smtClean="0"/>
               <a:t>2026/7/30</a:t>
             </a:fld>
@@ -1245,7 +1245,7 @@
           <p:cNvPr id="5" name="フッター プレースホルダー 4">
             <a:extLst>
               <a:ext uri="{FF2B5EF4-FFF2-40B4-BE49-F238E27FC236}">
-                <a16:creationId xmlns:a16="http://schemas.microsoft.com/office/drawing/2014/main" id="{7611A828-A777-7EDE-8B20-5542CF81F4F2}"/>
+                <a16:creationId xmlns:a16="http://schemas.microsoft.com/office/drawing/2014/main" id="{054C9F18-08A1-7480-B032-C38588CA1F8F}"/>
               </a:ext>
             </a:extLst>
           </p:cNvPr>
@@ -1270,7 +1270,7 @@
           <p:cNvPr id="6" name="スライド番号プレースホルダー 5">
             <a:extLst>
               <a:ext uri="{FF2B5EF4-FFF2-40B4-BE49-F238E27FC236}">
-                <a16:creationId xmlns:a16="http://schemas.microsoft.com/office/drawing/2014/main" id="{ECCE8E90-D048-0C0F-63BE-BB699C8AEAF9}"/>
+                <a16:creationId xmlns:a16="http://schemas.microsoft.com/office/drawing/2014/main" id="{FDD67EAF-B59F-805C-19B1-218638DFBA55}"/>
               </a:ext>
             </a:extLst>
           </p:cNvPr>
@@ -1286,7 +1286,7 @@
           <a:bodyPr/>
           <a:lstStyle/>
           <a:p>
-            <a:fld id="{CB2CCBF8-8C76-4712-A1D1-56F42B37C6B7}" type="slidenum">
+            <a:fld id="{5C096DF3-5EEF-4F17-BA3D-0C90A8AA5B28}" type="slidenum">
               <a:rPr kumimoji="1" lang="ja-JP" altLang="en-US" smtClean="0"/>
               <a:t>‹#›</a:t>
             </a:fld>
@@ -1297,7 +1297,7 @@
     </p:spTree>
     <p:extLst>
       <p:ext uri="{BB962C8B-B14F-4D97-AF65-F5344CB8AC3E}">
-        <p14:creationId xmlns:p14="http://schemas.microsoft.com/office/powerpoint/2010/main" val="175243337"/>
+        <p14:creationId xmlns:p14="http://schemas.microsoft.com/office/powerpoint/2010/main" val="2543070065"/>
       </p:ext>
     </p:extLst>
   </p:cSld>
@@ -1329,7 +1329,7 @@
           <p:cNvPr id="2" name="タイトル 1">
             <a:extLst>
               <a:ext uri="{FF2B5EF4-FFF2-40B4-BE49-F238E27FC236}">
-                <a16:creationId xmlns:a16="http://schemas.microsoft.com/office/drawing/2014/main" id="{4D8451F4-8AD6-62EA-451A-245E954F055C}"/>
+                <a16:creationId xmlns:a16="http://schemas.microsoft.com/office/drawing/2014/main" id="{6C57976C-B993-3BC0-D068-051F69944615}"/>
               </a:ext>
             </a:extLst>
           </p:cNvPr>
@@ -1357,7 +1357,7 @@
           <p:cNvPr id="3" name="コンテンツ プレースホルダー 2">
             <a:extLst>
               <a:ext uri="{FF2B5EF4-FFF2-40B4-BE49-F238E27FC236}">
-                <a16:creationId xmlns:a16="http://schemas.microsoft.com/office/drawing/2014/main" id="{50DAA8E2-C2D8-7D9F-8816-584E9A5FA9C3}"/>
+                <a16:creationId xmlns:a16="http://schemas.microsoft.com/office/drawing/2014/main" id="{FA21469C-511D-E45C-A33A-F92CB5213938}"/>
               </a:ext>
             </a:extLst>
           </p:cNvPr>
@@ -1451,7 +1451,7 @@
           <p:cNvPr id="4" name="コンテンツ プレースホルダー 3">
             <a:extLst>
               <a:ext uri="{FF2B5EF4-FFF2-40B4-BE49-F238E27FC236}">
-                <a16:creationId xmlns:a16="http://schemas.microsoft.com/office/drawing/2014/main" id="{A47D31E5-5166-AAD4-B690-E9F57A94EC71}"/>
+                <a16:creationId xmlns:a16="http://schemas.microsoft.com/office/drawing/2014/main" id="{BF708CA9-DED7-07CD-51A5-4604254BAA4B}"/>
               </a:ext>
             </a:extLst>
           </p:cNvPr>
@@ -1545,7 +1545,7 @@
           <p:cNvPr id="5" name="日付プレースホルダー 4">
             <a:extLst>
               <a:ext uri="{FF2B5EF4-FFF2-40B4-BE49-F238E27FC236}">
-                <a16:creationId xmlns:a16="http://schemas.microsoft.com/office/drawing/2014/main" id="{5BDCD7E1-B41A-FEE0-E338-24E843941943}"/>
+                <a16:creationId xmlns:a16="http://schemas.microsoft.com/office/drawing/2014/main" id="{F5407021-1887-6F16-D0A4-F032573EACB4}"/>
               </a:ext>
             </a:extLst>
           </p:cNvPr>
@@ -1561,7 +1561,7 @@
           <a:bodyPr/>
           <a:lstStyle/>
           <a:p>
-            <a:fld id="{2EC9E279-55A6-4183-81F5-D795B217ABB2}" type="datetimeFigureOut">
+            <a:fld id="{4679A685-9978-4C70-A0F7-7B7CB4B230CA}" type="datetimeFigureOut">
               <a:rPr kumimoji="1" lang="ja-JP" altLang="en-US" smtClean="0"/>
               <a:t>2026/7/30</a:t>
             </a:fld>
@@ -1574,7 +1574,7 @@
           <p:cNvPr id="6" name="フッター プレースホルダー 5">
             <a:extLst>
               <a:ext uri="{FF2B5EF4-FFF2-40B4-BE49-F238E27FC236}">
-                <a16:creationId xmlns:a16="http://schemas.microsoft.com/office/drawing/2014/main" id="{2A3AB8F0-2EDD-F2EE-C3BF-2FCB4CF40A89}"/>
+                <a16:creationId xmlns:a16="http://schemas.microsoft.com/office/drawing/2014/main" id="{FE1E4782-9D48-7665-B596-96E420D6CBB9}"/>
               </a:ext>
             </a:extLst>
           </p:cNvPr>
@@ -1599,7 +1599,7 @@
           <p:cNvPr id="7" name="スライド番号プレースホルダー 6">
             <a:extLst>
               <a:ext uri="{FF2B5EF4-FFF2-40B4-BE49-F238E27FC236}">
-                <a16:creationId xmlns:a16="http://schemas.microsoft.com/office/drawing/2014/main" id="{E6B320E2-77BC-9770-B4AD-0476A2039DE3}"/>
+                <a16:creationId xmlns:a16="http://schemas.microsoft.com/office/drawing/2014/main" id="{10D84036-B358-719B-CF45-67FBB86DA882}"/>
               </a:ext>
             </a:extLst>
           </p:cNvPr>
@@ -1615,7 +1615,7 @@
           <a:bodyPr/>
           <a:lstStyle/>
           <a:p>
-            <a:fld id="{CB2CCBF8-8C76-4712-A1D1-56F42B37C6B7}" type="slidenum">
+            <a:fld id="{5C096DF3-5EEF-4F17-BA3D-0C90A8AA5B28}" type="slidenum">
               <a:rPr kumimoji="1" lang="ja-JP" altLang="en-US" smtClean="0"/>
               <a:t>‹#›</a:t>
             </a:fld>
@@ -1626,7 +1626,7 @@
     </p:spTree>
     <p:extLst>
       <p:ext uri="{BB962C8B-B14F-4D97-AF65-F5344CB8AC3E}">
-        <p14:creationId xmlns:p14="http://schemas.microsoft.com/office/powerpoint/2010/main" val="1577756216"/>
+        <p14:creationId xmlns:p14="http://schemas.microsoft.com/office/powerpoint/2010/main" val="2422997940"/>
       </p:ext>
     </p:extLst>
   </p:cSld>
@@ -1658,7 +1658,7 @@
           <p:cNvPr id="2" name="タイトル 1">
             <a:extLst>
               <a:ext uri="{FF2B5EF4-FFF2-40B4-BE49-F238E27FC236}">
-                <a16:creationId xmlns:a16="http://schemas.microsoft.com/office/drawing/2014/main" id="{98CBBD29-44DE-7822-EA9E-EDF757A79AE4}"/>
+                <a16:creationId xmlns:a16="http://schemas.microsoft.com/office/drawing/2014/main" id="{20AB40FD-813E-AF3D-E86C-CD45490EBA95}"/>
               </a:ext>
             </a:extLst>
           </p:cNvPr>
@@ -1691,7 +1691,7 @@
           <p:cNvPr id="3" name="テキスト プレースホルダー 2">
             <a:extLst>
               <a:ext uri="{FF2B5EF4-FFF2-40B4-BE49-F238E27FC236}">
-                <a16:creationId xmlns:a16="http://schemas.microsoft.com/office/drawing/2014/main" id="{C9A1B0A4-79B8-6109-4ED0-5CC91561C7F7}"/>
+                <a16:creationId xmlns:a16="http://schemas.microsoft.com/office/drawing/2014/main" id="{F626A49D-6FC6-4593-D3E0-BE09BD653A8C}"/>
               </a:ext>
             </a:extLst>
           </p:cNvPr>
@@ -1762,7 +1762,7 @@
           <p:cNvPr id="4" name="コンテンツ プレースホルダー 3">
             <a:extLst>
               <a:ext uri="{FF2B5EF4-FFF2-40B4-BE49-F238E27FC236}">
-                <a16:creationId xmlns:a16="http://schemas.microsoft.com/office/drawing/2014/main" id="{504039F4-7B20-6EF1-2F11-AB0CD6378256}"/>
+                <a16:creationId xmlns:a16="http://schemas.microsoft.com/office/drawing/2014/main" id="{D1DFB252-E390-21FC-2C37-3632CCEB1CF9}"/>
               </a:ext>
             </a:extLst>
           </p:cNvPr>
@@ -1856,7 +1856,7 @@
           <p:cNvPr id="5" name="テキスト プレースホルダー 4">
             <a:extLst>
               <a:ext uri="{FF2B5EF4-FFF2-40B4-BE49-F238E27FC236}">
-                <a16:creationId xmlns:a16="http://schemas.microsoft.com/office/drawing/2014/main" id="{4C786460-FB6B-EBA1-2C05-210CAC1298FE}"/>
+                <a16:creationId xmlns:a16="http://schemas.microsoft.com/office/drawing/2014/main" id="{67CB875F-E372-37E2-B3D8-99483AD02E1C}"/>
               </a:ext>
             </a:extLst>
           </p:cNvPr>
@@ -1927,7 +1927,7 @@
           <p:cNvPr id="6" name="コンテンツ プレースホルダー 5">
             <a:extLst>
               <a:ext uri="{FF2B5EF4-FFF2-40B4-BE49-F238E27FC236}">
-                <a16:creationId xmlns:a16="http://schemas.microsoft.com/office/drawing/2014/main" id="{3363695C-7C55-B4E2-2C49-C9325487A73F}"/>
+                <a16:creationId xmlns:a16="http://schemas.microsoft.com/office/drawing/2014/main" id="{C7346BE0-CF3F-D2AD-7E8E-E7F9C5681FAB}"/>
               </a:ext>
             </a:extLst>
           </p:cNvPr>
@@ -2021,7 +2021,7 @@
           <p:cNvPr id="7" name="日付プレースホルダー 6">
             <a:extLst>
               <a:ext uri="{FF2B5EF4-FFF2-40B4-BE49-F238E27FC236}">
-                <a16:creationId xmlns:a16="http://schemas.microsoft.com/office/drawing/2014/main" id="{02EF38E5-F11C-D44F-1C8C-29A73BD5A3D3}"/>
+                <a16:creationId xmlns:a16="http://schemas.microsoft.com/office/drawing/2014/main" id="{58BDBA5B-344C-92FB-E59A-0748815E829E}"/>
               </a:ext>
             </a:extLst>
           </p:cNvPr>
@@ -2037,7 +2037,7 @@
           <a:bodyPr/>
           <a:lstStyle/>
           <a:p>
-            <a:fld id="{2EC9E279-55A6-4183-81F5-D795B217ABB2}" type="datetimeFigureOut">
+            <a:fld id="{4679A685-9978-4C70-A0F7-7B7CB4B230CA}" type="datetimeFigureOut">
               <a:rPr kumimoji="1" lang="ja-JP" altLang="en-US" smtClean="0"/>
               <a:t>2026/7/30</a:t>
             </a:fld>
@@ -2050,7 +2050,7 @@
           <p:cNvPr id="8" name="フッター プレースホルダー 7">
             <a:extLst>
               <a:ext uri="{FF2B5EF4-FFF2-40B4-BE49-F238E27FC236}">
-                <a16:creationId xmlns:a16="http://schemas.microsoft.com/office/drawing/2014/main" id="{A42D684A-EA36-2D01-68EC-17FACD15AF2F}"/>
+                <a16:creationId xmlns:a16="http://schemas.microsoft.com/office/drawing/2014/main" id="{14B220E6-6F50-3B91-0DB7-A0F90ECA6C6B}"/>
               </a:ext>
             </a:extLst>
           </p:cNvPr>
@@ -2075,7 +2075,7 @@
           <p:cNvPr id="9" name="スライド番号プレースホルダー 8">
             <a:extLst>
               <a:ext uri="{FF2B5EF4-FFF2-40B4-BE49-F238E27FC236}">
-                <a16:creationId xmlns:a16="http://schemas.microsoft.com/office/drawing/2014/main" id="{C5310AD7-4DED-E520-AFD5-B710307E4F37}"/>
+                <a16:creationId xmlns:a16="http://schemas.microsoft.com/office/drawing/2014/main" id="{FD30FE6F-6256-79AD-C3AF-CC60A1B15599}"/>
               </a:ext>
             </a:extLst>
           </p:cNvPr>
@@ -2091,7 +2091,7 @@
           <a:bodyPr/>
           <a:lstStyle/>
           <a:p>
-            <a:fld id="{CB2CCBF8-8C76-4712-A1D1-56F42B37C6B7}" type="slidenum">
+            <a:fld id="{5C096DF3-5EEF-4F17-BA3D-0C90A8AA5B28}" type="slidenum">
               <a:rPr kumimoji="1" lang="ja-JP" altLang="en-US" smtClean="0"/>
               <a:t>‹#›</a:t>
             </a:fld>
@@ -2102,7 +2102,7 @@
     </p:spTree>
     <p:extLst>
       <p:ext uri="{BB962C8B-B14F-4D97-AF65-F5344CB8AC3E}">
-        <p14:creationId xmlns:p14="http://schemas.microsoft.com/office/powerpoint/2010/main" val="147568703"/>
+        <p14:creationId xmlns:p14="http://schemas.microsoft.com/office/powerpoint/2010/main" val="1658874972"/>
       </p:ext>
     </p:extLst>
   </p:cSld>
@@ -2134,7 +2134,7 @@
           <p:cNvPr id="2" name="タイトル 1">
             <a:extLst>
               <a:ext uri="{FF2B5EF4-FFF2-40B4-BE49-F238E27FC236}">
-                <a16:creationId xmlns:a16="http://schemas.microsoft.com/office/drawing/2014/main" id="{860E298C-26BF-A6F2-FEE0-84C118B1DC94}"/>
+                <a16:creationId xmlns:a16="http://schemas.microsoft.com/office/drawing/2014/main" id="{7DE1B49A-A45A-5CDE-7C0D-C99447721B43}"/>
               </a:ext>
             </a:extLst>
           </p:cNvPr>
@@ -2162,7 +2162,7 @@
           <p:cNvPr id="3" name="日付プレースホルダー 2">
             <a:extLst>
               <a:ext uri="{FF2B5EF4-FFF2-40B4-BE49-F238E27FC236}">
-                <a16:creationId xmlns:a16="http://schemas.microsoft.com/office/drawing/2014/main" id="{C21316C8-59E2-BBA6-FA2F-D5F4DC241CCB}"/>
+                <a16:creationId xmlns:a16="http://schemas.microsoft.com/office/drawing/2014/main" id="{DDC4F0BD-5633-5F46-9CF9-286861120A84}"/>
               </a:ext>
             </a:extLst>
           </p:cNvPr>
@@ -2178,7 +2178,7 @@
           <a:bodyPr/>
           <a:lstStyle/>
           <a:p>
-            <a:fld id="{2EC9E279-55A6-4183-81F5-D795B217ABB2}" type="datetimeFigureOut">
+            <a:fld id="{4679A685-9978-4C70-A0F7-7B7CB4B230CA}" type="datetimeFigureOut">
               <a:rPr kumimoji="1" lang="ja-JP" altLang="en-US" smtClean="0"/>
               <a:t>2026/7/30</a:t>
             </a:fld>
@@ -2191,7 +2191,7 @@
           <p:cNvPr id="4" name="フッター プレースホルダー 3">
             <a:extLst>
               <a:ext uri="{FF2B5EF4-FFF2-40B4-BE49-F238E27FC236}">
-                <a16:creationId xmlns:a16="http://schemas.microsoft.com/office/drawing/2014/main" id="{A8A69C25-713E-8029-0AA4-1625727C8968}"/>
+                <a16:creationId xmlns:a16="http://schemas.microsoft.com/office/drawing/2014/main" id="{E5838353-E3A4-F25B-BBB5-81D0B71212BA}"/>
               </a:ext>
             </a:extLst>
           </p:cNvPr>
@@ -2216,7 +2216,7 @@
           <p:cNvPr id="5" name="スライド番号プレースホルダー 4">
             <a:extLst>
               <a:ext uri="{FF2B5EF4-FFF2-40B4-BE49-F238E27FC236}">
-                <a16:creationId xmlns:a16="http://schemas.microsoft.com/office/drawing/2014/main" id="{2213684C-E53B-BC61-B221-95CA54D74770}"/>
+                <a16:creationId xmlns:a16="http://schemas.microsoft.com/office/drawing/2014/main" id="{2B10918C-3F5A-E417-796E-68C8B05FB694}"/>
               </a:ext>
             </a:extLst>
           </p:cNvPr>
@@ -2232,7 +2232,7 @@
           <a:bodyPr/>
           <a:lstStyle/>
           <a:p>
-            <a:fld id="{CB2CCBF8-8C76-4712-A1D1-56F42B37C6B7}" type="slidenum">
+            <a:fld id="{5C096DF3-5EEF-4F17-BA3D-0C90A8AA5B28}" type="slidenum">
               <a:rPr kumimoji="1" lang="ja-JP" altLang="en-US" smtClean="0"/>
               <a:t>‹#›</a:t>
             </a:fld>
@@ -2243,7 +2243,7 @@
     </p:spTree>
     <p:extLst>
       <p:ext uri="{BB962C8B-B14F-4D97-AF65-F5344CB8AC3E}">
-        <p14:creationId xmlns:p14="http://schemas.microsoft.com/office/powerpoint/2010/main" val="2304590831"/>
+        <p14:creationId xmlns:p14="http://schemas.microsoft.com/office/powerpoint/2010/main" val="2696350468"/>
       </p:ext>
     </p:extLst>
   </p:cSld>
@@ -2275,7 +2275,7 @@
           <p:cNvPr id="2" name="日付プレースホルダー 1">
             <a:extLst>
               <a:ext uri="{FF2B5EF4-FFF2-40B4-BE49-F238E27FC236}">
-                <a16:creationId xmlns:a16="http://schemas.microsoft.com/office/drawing/2014/main" id="{F92EF1F2-636A-F648-0143-B5041AEF1CB1}"/>
+                <a16:creationId xmlns:a16="http://schemas.microsoft.com/office/drawing/2014/main" id="{7FAFC7D1-E663-272F-E43B-A85E79074FE3}"/>
               </a:ext>
             </a:extLst>
           </p:cNvPr>
@@ -2291,7 +2291,7 @@
           <a:bodyPr/>
           <a:lstStyle/>
           <a:p>
-            <a:fld id="{2EC9E279-55A6-4183-81F5-D795B217ABB2}" type="datetimeFigureOut">
+            <a:fld id="{4679A685-9978-4C70-A0F7-7B7CB4B230CA}" type="datetimeFigureOut">
               <a:rPr kumimoji="1" lang="ja-JP" altLang="en-US" smtClean="0"/>
               <a:t>2026/7/30</a:t>
             </a:fld>
@@ -2304,7 +2304,7 @@
           <p:cNvPr id="3" name="フッター プレースホルダー 2">
             <a:extLst>
               <a:ext uri="{FF2B5EF4-FFF2-40B4-BE49-F238E27FC236}">
-                <a16:creationId xmlns:a16="http://schemas.microsoft.com/office/drawing/2014/main" id="{FDFE0C44-F208-6DD6-DDB2-A68642231C0E}"/>
+                <a16:creationId xmlns:a16="http://schemas.microsoft.com/office/drawing/2014/main" id="{EC99DB49-7A3F-B72B-F3A2-648E1BAB1BC9}"/>
               </a:ext>
             </a:extLst>
           </p:cNvPr>
@@ -2329,7 +2329,7 @@
           <p:cNvPr id="4" name="スライド番号プレースホルダー 3">
             <a:extLst>
               <a:ext uri="{FF2B5EF4-FFF2-40B4-BE49-F238E27FC236}">
-                <a16:creationId xmlns:a16="http://schemas.microsoft.com/office/drawing/2014/main" id="{4596CE2D-45B3-4AE5-7F9E-AA316B98D9E5}"/>
+                <a16:creationId xmlns:a16="http://schemas.microsoft.com/office/drawing/2014/main" id="{8A821D8A-003E-6353-4597-4B1256A233C4}"/>
               </a:ext>
             </a:extLst>
           </p:cNvPr>
@@ -2345,7 +2345,7 @@
           <a:bodyPr/>
           <a:lstStyle/>
           <a:p>
-            <a:fld id="{CB2CCBF8-8C76-4712-A1D1-56F42B37C6B7}" type="slidenum">
+            <a:fld id="{5C096DF3-5EEF-4F17-BA3D-0C90A8AA5B28}" type="slidenum">
               <a:rPr kumimoji="1" lang="ja-JP" altLang="en-US" smtClean="0"/>
               <a:t>‹#›</a:t>
             </a:fld>
@@ -2356,7 +2356,7 @@
     </p:spTree>
     <p:extLst>
       <p:ext uri="{BB962C8B-B14F-4D97-AF65-F5344CB8AC3E}">
-        <p14:creationId xmlns:p14="http://schemas.microsoft.com/office/powerpoint/2010/main" val="2658596229"/>
+        <p14:creationId xmlns:p14="http://schemas.microsoft.com/office/powerpoint/2010/main" val="1863539575"/>
       </p:ext>
     </p:extLst>
   </p:cSld>
@@ -2388,7 +2388,7 @@
           <p:cNvPr id="2" name="タイトル 1">
             <a:extLst>
               <a:ext uri="{FF2B5EF4-FFF2-40B4-BE49-F238E27FC236}">
-                <a16:creationId xmlns:a16="http://schemas.microsoft.com/office/drawing/2014/main" id="{F3CACCCE-D575-6C55-EFFF-B0FBCD1B1732}"/>
+                <a16:creationId xmlns:a16="http://schemas.microsoft.com/office/drawing/2014/main" id="{F3E51AAF-3B1F-76D7-02D6-C130C1EAE1FF}"/>
               </a:ext>
             </a:extLst>
           </p:cNvPr>
@@ -2425,7 +2425,7 @@
           <p:cNvPr id="3" name="コンテンツ プレースホルダー 2">
             <a:extLst>
               <a:ext uri="{FF2B5EF4-FFF2-40B4-BE49-F238E27FC236}">
-                <a16:creationId xmlns:a16="http://schemas.microsoft.com/office/drawing/2014/main" id="{79DA1DE3-9C3C-0253-3E81-252D8828639F}"/>
+                <a16:creationId xmlns:a16="http://schemas.microsoft.com/office/drawing/2014/main" id="{46E8F022-8E09-726B-E3C6-28624C19C692}"/>
               </a:ext>
             </a:extLst>
           </p:cNvPr>
@@ -2547,7 +2547,7 @@
           <p:cNvPr id="4" name="テキスト プレースホルダー 3">
             <a:extLst>
               <a:ext uri="{FF2B5EF4-FFF2-40B4-BE49-F238E27FC236}">
-                <a16:creationId xmlns:a16="http://schemas.microsoft.com/office/drawing/2014/main" id="{54A21DC0-BC63-38C9-9D3E-B74BDF1BC086}"/>
+                <a16:creationId xmlns:a16="http://schemas.microsoft.com/office/drawing/2014/main" id="{4331E987-1FE1-8F26-C38B-897DC3999DA0}"/>
               </a:ext>
             </a:extLst>
           </p:cNvPr>
@@ -2618,7 +2618,7 @@
           <p:cNvPr id="5" name="日付プレースホルダー 4">
             <a:extLst>
               <a:ext uri="{FF2B5EF4-FFF2-40B4-BE49-F238E27FC236}">
-                <a16:creationId xmlns:a16="http://schemas.microsoft.com/office/drawing/2014/main" id="{90127D0C-297B-5845-CCEC-B09F81DA8B31}"/>
+                <a16:creationId xmlns:a16="http://schemas.microsoft.com/office/drawing/2014/main" id="{95D6308D-3543-0885-9AA7-4010C9D99440}"/>
               </a:ext>
             </a:extLst>
           </p:cNvPr>
@@ -2634,7 +2634,7 @@
           <a:bodyPr/>
           <a:lstStyle/>
           <a:p>
-            <a:fld id="{2EC9E279-55A6-4183-81F5-D795B217ABB2}" type="datetimeFigureOut">
+            <a:fld id="{4679A685-9978-4C70-A0F7-7B7CB4B230CA}" type="datetimeFigureOut">
               <a:rPr kumimoji="1" lang="ja-JP" altLang="en-US" smtClean="0"/>
               <a:t>2026/7/30</a:t>
             </a:fld>
@@ -2647,7 +2647,7 @@
           <p:cNvPr id="6" name="フッター プレースホルダー 5">
             <a:extLst>
               <a:ext uri="{FF2B5EF4-FFF2-40B4-BE49-F238E27FC236}">
-                <a16:creationId xmlns:a16="http://schemas.microsoft.com/office/drawing/2014/main" id="{E1DDD5FA-18A9-ABA2-A327-DFB64A8A4E2F}"/>
+                <a16:creationId xmlns:a16="http://schemas.microsoft.com/office/drawing/2014/main" id="{5D28E239-1D14-8C51-C579-3E43680D300F}"/>
               </a:ext>
             </a:extLst>
           </p:cNvPr>
@@ -2672,7 +2672,7 @@
           <p:cNvPr id="7" name="スライド番号プレースホルダー 6">
             <a:extLst>
               <a:ext uri="{FF2B5EF4-FFF2-40B4-BE49-F238E27FC236}">
-                <a16:creationId xmlns:a16="http://schemas.microsoft.com/office/drawing/2014/main" id="{63D0D648-92C0-1FE5-3011-5C8C2B45B4DA}"/>
+                <a16:creationId xmlns:a16="http://schemas.microsoft.com/office/drawing/2014/main" id="{B1C8251E-3607-177F-39DE-899A19DD133B}"/>
               </a:ext>
             </a:extLst>
           </p:cNvPr>
@@ -2688,7 +2688,7 @@
           <a:bodyPr/>
           <a:lstStyle/>
           <a:p>
-            <a:fld id="{CB2CCBF8-8C76-4712-A1D1-56F42B37C6B7}" type="slidenum">
+            <a:fld id="{5C096DF3-5EEF-4F17-BA3D-0C90A8AA5B28}" type="slidenum">
               <a:rPr kumimoji="1" lang="ja-JP" altLang="en-US" smtClean="0"/>
               <a:t>‹#›</a:t>
             </a:fld>
@@ -2699,7 +2699,7 @@
     </p:spTree>
     <p:extLst>
       <p:ext uri="{BB962C8B-B14F-4D97-AF65-F5344CB8AC3E}">
-        <p14:creationId xmlns:p14="http://schemas.microsoft.com/office/powerpoint/2010/main" val="3211650838"/>
+        <p14:creationId xmlns:p14="http://schemas.microsoft.com/office/powerpoint/2010/main" val="3498952295"/>
       </p:ext>
     </p:extLst>
   </p:cSld>
@@ -2731,7 +2731,7 @@
           <p:cNvPr id="2" name="タイトル 1">
             <a:extLst>
               <a:ext uri="{FF2B5EF4-FFF2-40B4-BE49-F238E27FC236}">
-                <a16:creationId xmlns:a16="http://schemas.microsoft.com/office/drawing/2014/main" id="{82969001-05D4-7873-0579-CD41BD6C67D8}"/>
+                <a16:creationId xmlns:a16="http://schemas.microsoft.com/office/drawing/2014/main" id="{7C5B49F4-3834-FBEE-6853-00C8B2924E08}"/>
               </a:ext>
             </a:extLst>
           </p:cNvPr>
@@ -2768,7 +2768,7 @@
           <p:cNvPr id="3" name="図プレースホルダー 2">
             <a:extLst>
               <a:ext uri="{FF2B5EF4-FFF2-40B4-BE49-F238E27FC236}">
-                <a16:creationId xmlns:a16="http://schemas.microsoft.com/office/drawing/2014/main" id="{71F1A9CE-901C-1C4C-68BC-DEFDD6E95544}"/>
+                <a16:creationId xmlns:a16="http://schemas.microsoft.com/office/drawing/2014/main" id="{16AA28FB-813D-70DF-9719-C8686EB05920}"/>
               </a:ext>
             </a:extLst>
           </p:cNvPr>
@@ -2835,7 +2835,7 @@
           <p:cNvPr id="4" name="テキスト プレースホルダー 3">
             <a:extLst>
               <a:ext uri="{FF2B5EF4-FFF2-40B4-BE49-F238E27FC236}">
-                <a16:creationId xmlns:a16="http://schemas.microsoft.com/office/drawing/2014/main" id="{73B57E68-5134-D65D-4E34-36F1A0F179A9}"/>
+                <a16:creationId xmlns:a16="http://schemas.microsoft.com/office/drawing/2014/main" id="{255B5696-29D2-487F-476D-43627E75D741}"/>
               </a:ext>
             </a:extLst>
           </p:cNvPr>
@@ -2906,7 +2906,7 @@
           <p:cNvPr id="5" name="日付プレースホルダー 4">
             <a:extLst>
               <a:ext uri="{FF2B5EF4-FFF2-40B4-BE49-F238E27FC236}">
-                <a16:creationId xmlns:a16="http://schemas.microsoft.com/office/drawing/2014/main" id="{4BD6107F-FEF0-AF74-FE85-6F3A6EB08169}"/>
+                <a16:creationId xmlns:a16="http://schemas.microsoft.com/office/drawing/2014/main" id="{0B8C883F-D3A9-69DB-B06E-A9F3409721CE}"/>
               </a:ext>
             </a:extLst>
           </p:cNvPr>
@@ -2922,7 +2922,7 @@
           <a:bodyPr/>
           <a:lstStyle/>
           <a:p>
-            <a:fld id="{2EC9E279-55A6-4183-81F5-D795B217ABB2}" type="datetimeFigureOut">
+            <a:fld id="{4679A685-9978-4C70-A0F7-7B7CB4B230CA}" type="datetimeFigureOut">
               <a:rPr kumimoji="1" lang="ja-JP" altLang="en-US" smtClean="0"/>
               <a:t>2026/7/30</a:t>
             </a:fld>
@@ -2935,7 +2935,7 @@
           <p:cNvPr id="6" name="フッター プレースホルダー 5">
             <a:extLst>
               <a:ext uri="{FF2B5EF4-FFF2-40B4-BE49-F238E27FC236}">
-                <a16:creationId xmlns:a16="http://schemas.microsoft.com/office/drawing/2014/main" id="{3CD1200A-AA23-4D44-9373-0095E798275C}"/>
+                <a16:creationId xmlns:a16="http://schemas.microsoft.com/office/drawing/2014/main" id="{B7743D5B-B20F-D2D5-945F-33E931F3A080}"/>
               </a:ext>
             </a:extLst>
           </p:cNvPr>
@@ -2960,7 +2960,7 @@
           <p:cNvPr id="7" name="スライド番号プレースホルダー 6">
             <a:extLst>
               <a:ext uri="{FF2B5EF4-FFF2-40B4-BE49-F238E27FC236}">
-                <a16:creationId xmlns:a16="http://schemas.microsoft.com/office/drawing/2014/main" id="{545BCCA2-DEC6-A33E-A813-08F64528CF45}"/>
+                <a16:creationId xmlns:a16="http://schemas.microsoft.com/office/drawing/2014/main" id="{D4270D72-69ED-18ED-239B-DADF52626AFB}"/>
               </a:ext>
             </a:extLst>
           </p:cNvPr>
@@ -2976,7 +2976,7 @@
           <a:bodyPr/>
           <a:lstStyle/>
           <a:p>
-            <a:fld id="{CB2CCBF8-8C76-4712-A1D1-56F42B37C6B7}" type="slidenum">
+            <a:fld id="{5C096DF3-5EEF-4F17-BA3D-0C90A8AA5B28}" type="slidenum">
               <a:rPr kumimoji="1" lang="ja-JP" altLang="en-US" smtClean="0"/>
               <a:t>‹#›</a:t>
             </a:fld>
@@ -2987,7 +2987,7 @@
     </p:spTree>
     <p:extLst>
       <p:ext uri="{BB962C8B-B14F-4D97-AF65-F5344CB8AC3E}">
-        <p14:creationId xmlns:p14="http://schemas.microsoft.com/office/powerpoint/2010/main" val="1088609520"/>
+        <p14:creationId xmlns:p14="http://schemas.microsoft.com/office/powerpoint/2010/main" val="329077971"/>
       </p:ext>
     </p:extLst>
   </p:cSld>
@@ -3024,7 +3024,7 @@
           <p:cNvPr id="2" name="タイトル プレースホルダー 1">
             <a:extLst>
               <a:ext uri="{FF2B5EF4-FFF2-40B4-BE49-F238E27FC236}">
-                <a16:creationId xmlns:a16="http://schemas.microsoft.com/office/drawing/2014/main" id="{6D082B02-4485-4651-009B-576DE1F2FA1A}"/>
+                <a16:creationId xmlns:a16="http://schemas.microsoft.com/office/drawing/2014/main" id="{99AF808F-D80F-3B0E-563D-B02F699B205F}"/>
               </a:ext>
             </a:extLst>
           </p:cNvPr>
@@ -3062,7 +3062,7 @@
           <p:cNvPr id="3" name="テキスト プレースホルダー 2">
             <a:extLst>
               <a:ext uri="{FF2B5EF4-FFF2-40B4-BE49-F238E27FC236}">
-                <a16:creationId xmlns:a16="http://schemas.microsoft.com/office/drawing/2014/main" id="{BE14B263-F19A-BBFA-5989-DD4A294E03DF}"/>
+                <a16:creationId xmlns:a16="http://schemas.microsoft.com/office/drawing/2014/main" id="{E7C25F2D-14A1-F4D9-B8F8-DC483427E43C}"/>
               </a:ext>
             </a:extLst>
           </p:cNvPr>
@@ -3161,7 +3161,7 @@
           <p:cNvPr id="4" name="日付プレースホルダー 3">
             <a:extLst>
               <a:ext uri="{FF2B5EF4-FFF2-40B4-BE49-F238E27FC236}">
-                <a16:creationId xmlns:a16="http://schemas.microsoft.com/office/drawing/2014/main" id="{33462ECD-49C5-F37C-7F44-70BC89A7B22E}"/>
+                <a16:creationId xmlns:a16="http://schemas.microsoft.com/office/drawing/2014/main" id="{66E43468-04BD-4D25-EFDC-5A28E444DC34}"/>
               </a:ext>
             </a:extLst>
           </p:cNvPr>
@@ -3195,7 +3195,7 @@
             </a:lvl1pPr>
           </a:lstStyle>
           <a:p>
-            <a:fld id="{2EC9E279-55A6-4183-81F5-D795B217ABB2}" type="datetimeFigureOut">
+            <a:fld id="{4679A685-9978-4C70-A0F7-7B7CB4B230CA}" type="datetimeFigureOut">
               <a:rPr kumimoji="1" lang="ja-JP" altLang="en-US" smtClean="0"/>
               <a:t>2026/7/30</a:t>
             </a:fld>
@@ -3208,7 +3208,7 @@
           <p:cNvPr id="5" name="フッター プレースホルダー 4">
             <a:extLst>
               <a:ext uri="{FF2B5EF4-FFF2-40B4-BE49-F238E27FC236}">
-                <a16:creationId xmlns:a16="http://schemas.microsoft.com/office/drawing/2014/main" id="{19853E8F-9CB4-7866-DDEC-2207299226E6}"/>
+                <a16:creationId xmlns:a16="http://schemas.microsoft.com/office/drawing/2014/main" id="{D97E181A-4529-A4EF-4F1F-BD234BCF8BBA}"/>
               </a:ext>
             </a:extLst>
           </p:cNvPr>
@@ -3251,7 +3251,7 @@
           <p:cNvPr id="6" name="スライド番号プレースホルダー 5">
             <a:extLst>
               <a:ext uri="{FF2B5EF4-FFF2-40B4-BE49-F238E27FC236}">
-                <a16:creationId xmlns:a16="http://schemas.microsoft.com/office/drawing/2014/main" id="{040D12A3-1A23-8943-ECFB-C107C45B65A5}"/>
+                <a16:creationId xmlns:a16="http://schemas.microsoft.com/office/drawing/2014/main" id="{0807F514-D978-51A4-9763-801129770C17}"/>
               </a:ext>
             </a:extLst>
           </p:cNvPr>
@@ -3285,7 +3285,7 @@
             </a:lvl1pPr>
           </a:lstStyle>
           <a:p>
-            <a:fld id="{CB2CCBF8-8C76-4712-A1D1-56F42B37C6B7}" type="slidenum">
+            <a:fld id="{5C096DF3-5EEF-4F17-BA3D-0C90A8AA5B28}" type="slidenum">
               <a:rPr kumimoji="1" lang="ja-JP" altLang="en-US" smtClean="0"/>
               <a:t>‹#›</a:t>
             </a:fld>
@@ -3296,7 +3296,7 @@
     </p:spTree>
     <p:extLst>
       <p:ext uri="{BB962C8B-B14F-4D97-AF65-F5344CB8AC3E}">
-        <p14:creationId xmlns:p14="http://schemas.microsoft.com/office/powerpoint/2010/main" val="63213661"/>
+        <p14:creationId xmlns:p14="http://schemas.microsoft.com/office/powerpoint/2010/main" val="367051639"/>
       </p:ext>
     </p:extLst>
   </p:cSld>
@@ -3619,7 +3619,7 @@
           <p:cNvPr id="2" name="テキスト ボックス 1">
             <a:extLst>
               <a:ext uri="{FF2B5EF4-FFF2-40B4-BE49-F238E27FC236}">
-                <a16:creationId xmlns:a16="http://schemas.microsoft.com/office/drawing/2014/main" id="{9D9555DE-134B-80A5-2F7E-5F05D66F606C}"/>
+                <a16:creationId xmlns:a16="http://schemas.microsoft.com/office/drawing/2014/main" id="{E476ADBA-AC5B-8754-097E-19F4B1E39E5B}"/>
               </a:ext>
             </a:extLst>
           </p:cNvPr>
@@ -3665,7 +3665,7 @@
           <p:cNvPr id="3" name="テキスト ボックス 2">
             <a:extLst>
               <a:ext uri="{FF2B5EF4-FFF2-40B4-BE49-F238E27FC236}">
-                <a16:creationId xmlns:a16="http://schemas.microsoft.com/office/drawing/2014/main" id="{E8DEBC7A-3466-1094-4E44-108812CD6BD8}"/>
+                <a16:creationId xmlns:a16="http://schemas.microsoft.com/office/drawing/2014/main" id="{2140E122-6B4F-7114-85BF-27E3FB2EBE80}"/>
               </a:ext>
             </a:extLst>
           </p:cNvPr>
@@ -3714,7 +3714,7 @@
           <p:cNvPr id="4" name="テキスト ボックス 3">
             <a:extLst>
               <a:ext uri="{FF2B5EF4-FFF2-40B4-BE49-F238E27FC236}">
-                <a16:creationId xmlns:a16="http://schemas.microsoft.com/office/drawing/2014/main" id="{C7823AB4-3AF5-BDA8-16C6-A080189E85F0}"/>
+                <a16:creationId xmlns:a16="http://schemas.microsoft.com/office/drawing/2014/main" id="{5EC2479E-2201-9A8B-4C3E-6F3C322C7146}"/>
               </a:ext>
             </a:extLst>
           </p:cNvPr>
@@ -3754,7 +3754,7 @@
           <p:cNvPr id="5" name="テキスト ボックス 4">
             <a:extLst>
               <a:ext uri="{FF2B5EF4-FFF2-40B4-BE49-F238E27FC236}">
-                <a16:creationId xmlns:a16="http://schemas.microsoft.com/office/drawing/2014/main" id="{6242315D-84C6-CEDA-F6B7-EFBE4BABD878}"/>
+                <a16:creationId xmlns:a16="http://schemas.microsoft.com/office/drawing/2014/main" id="{0FF89F04-2BEF-3AE5-5A60-DA2C8B415F0D}"/>
               </a:ext>
             </a:extLst>
           </p:cNvPr>
@@ -3801,7 +3801,7 @@
             <a:hlinkClick r:id="" action="ppaction://media"/>
             <a:extLst>
               <a:ext uri="{FF2B5EF4-FFF2-40B4-BE49-F238E27FC236}">
-                <a16:creationId xmlns:a16="http://schemas.microsoft.com/office/drawing/2014/main" id="{F9F8FCA3-FA2E-6365-DDCB-DB3A55D90282}"/>
+                <a16:creationId xmlns:a16="http://schemas.microsoft.com/office/drawing/2014/main" id="{A32D5972-A63B-4078-6455-0129337A3046}"/>
               </a:ext>
             </a:extLst>
           </p:cNvPr>
@@ -3836,7 +3836,7 @@
     </p:spTree>
     <p:extLst>
       <p:ext uri="{BB962C8B-B14F-4D97-AF65-F5344CB8AC3E}">
-        <p14:creationId xmlns:p14="http://schemas.microsoft.com/office/powerpoint/2010/main" val="1331301702"/>
+        <p14:creationId xmlns:p14="http://schemas.microsoft.com/office/powerpoint/2010/main" val="634245138"/>
       </p:ext>
     </p:extLst>
   </p:cSld>
@@ -3960,7 +3960,7 @@
           <p:cNvPr id="2" name="テキスト ボックス 1">
             <a:extLst>
               <a:ext uri="{FF2B5EF4-FFF2-40B4-BE49-F238E27FC236}">
-                <a16:creationId xmlns:a16="http://schemas.microsoft.com/office/drawing/2014/main" id="{F1448DD8-9527-516D-01E1-5D95B985C192}"/>
+                <a16:creationId xmlns:a16="http://schemas.microsoft.com/office/drawing/2014/main" id="{30D96572-3D15-75C6-6945-26289E1A0C15}"/>
               </a:ext>
             </a:extLst>
           </p:cNvPr>
@@ -4006,7 +4006,7 @@
           <p:cNvPr id="3" name="テキスト ボックス 2">
             <a:extLst>
               <a:ext uri="{FF2B5EF4-FFF2-40B4-BE49-F238E27FC236}">
-                <a16:creationId xmlns:a16="http://schemas.microsoft.com/office/drawing/2014/main" id="{EEDE5A70-F69B-3CA3-E942-01DB1ED836C9}"/>
+                <a16:creationId xmlns:a16="http://schemas.microsoft.com/office/drawing/2014/main" id="{F0477D01-89B5-A7B4-04E4-B1DE43D50402}"/>
               </a:ext>
             </a:extLst>
           </p:cNvPr>
@@ -4046,7 +4046,7 @@
           <p:cNvPr id="4" name="テキスト ボックス 3">
             <a:extLst>
               <a:ext uri="{FF2B5EF4-FFF2-40B4-BE49-F238E27FC236}">
-                <a16:creationId xmlns:a16="http://schemas.microsoft.com/office/drawing/2014/main" id="{096671B8-38BC-84B0-CAB9-7AF113D82D5B}"/>
+                <a16:creationId xmlns:a16="http://schemas.microsoft.com/office/drawing/2014/main" id="{914BAF6D-E30E-028F-4119-09BF37858DE0}"/>
               </a:ext>
             </a:extLst>
           </p:cNvPr>
@@ -4110,7 +4110,7 @@
           <p:cNvPr id="5" name="テキスト ボックス 4">
             <a:extLst>
               <a:ext uri="{FF2B5EF4-FFF2-40B4-BE49-F238E27FC236}">
-                <a16:creationId xmlns:a16="http://schemas.microsoft.com/office/drawing/2014/main" id="{C3274D14-0AD8-909D-81EE-7022AD3A968C}"/>
+                <a16:creationId xmlns:a16="http://schemas.microsoft.com/office/drawing/2014/main" id="{72202ABD-7728-3621-4D68-1918AF57F091}"/>
               </a:ext>
             </a:extLst>
           </p:cNvPr>
@@ -4157,7 +4157,7 @@
             <a:hlinkClick r:id="" action="ppaction://media"/>
             <a:extLst>
               <a:ext uri="{FF2B5EF4-FFF2-40B4-BE49-F238E27FC236}">
-                <a16:creationId xmlns:a16="http://schemas.microsoft.com/office/drawing/2014/main" id="{1240A3A0-CFD9-892F-4CA5-D4F68DC8DDFE}"/>
+                <a16:creationId xmlns:a16="http://schemas.microsoft.com/office/drawing/2014/main" id="{C5206CC1-0379-2932-AB17-0F13F48A1BAD}"/>
               </a:ext>
             </a:extLst>
           </p:cNvPr>
@@ -4192,7 +4192,7 @@
     </p:spTree>
     <p:extLst>
       <p:ext uri="{BB962C8B-B14F-4D97-AF65-F5344CB8AC3E}">
-        <p14:creationId xmlns:p14="http://schemas.microsoft.com/office/powerpoint/2010/main" val="1590537621"/>
+        <p14:creationId xmlns:p14="http://schemas.microsoft.com/office/powerpoint/2010/main" val="2635300276"/>
       </p:ext>
     </p:extLst>
   </p:cSld>
@@ -4316,7 +4316,7 @@
           <p:cNvPr id="2" name="テキスト ボックス 1">
             <a:extLst>
               <a:ext uri="{FF2B5EF4-FFF2-40B4-BE49-F238E27FC236}">
-                <a16:creationId xmlns:a16="http://schemas.microsoft.com/office/drawing/2014/main" id="{8BD9688B-04CE-F2D5-8021-0219B405380D}"/>
+                <a16:creationId xmlns:a16="http://schemas.microsoft.com/office/drawing/2014/main" id="{BA9A4BCF-24A5-4B0F-D94F-ACB6971DEE5F}"/>
               </a:ext>
             </a:extLst>
           </p:cNvPr>
@@ -4362,7 +4362,7 @@
           <p:cNvPr id="3" name="テキスト ボックス 2">
             <a:extLst>
               <a:ext uri="{FF2B5EF4-FFF2-40B4-BE49-F238E27FC236}">
-                <a16:creationId xmlns:a16="http://schemas.microsoft.com/office/drawing/2014/main" id="{67423B58-FEAE-6A2E-6B39-E5CFC6A32FCC}"/>
+                <a16:creationId xmlns:a16="http://schemas.microsoft.com/office/drawing/2014/main" id="{CBFDFA34-E3F5-284F-D54B-FAB118B0597B}"/>
               </a:ext>
             </a:extLst>
           </p:cNvPr>
@@ -4402,7 +4402,7 @@
           <p:cNvPr id="4" name="テキスト ボックス 3">
             <a:extLst>
               <a:ext uri="{FF2B5EF4-FFF2-40B4-BE49-F238E27FC236}">
-                <a16:creationId xmlns:a16="http://schemas.microsoft.com/office/drawing/2014/main" id="{D7DAB0BB-7214-4A4D-F2E4-170CB7FEBDC3}"/>
+                <a16:creationId xmlns:a16="http://schemas.microsoft.com/office/drawing/2014/main" id="{123459EE-7345-91C3-5B06-85AD7A64DD19}"/>
               </a:ext>
             </a:extLst>
           </p:cNvPr>
@@ -4497,7 +4497,7 @@
           <p:cNvPr id="5" name="テキスト ボックス 4">
             <a:extLst>
               <a:ext uri="{FF2B5EF4-FFF2-40B4-BE49-F238E27FC236}">
-                <a16:creationId xmlns:a16="http://schemas.microsoft.com/office/drawing/2014/main" id="{28BC9D0E-C7DB-992B-2B9E-9613A3E14590}"/>
+                <a16:creationId xmlns:a16="http://schemas.microsoft.com/office/drawing/2014/main" id="{B31C8CE6-2B0D-E1C1-BA82-5D2ACAFF6C64}"/>
               </a:ext>
             </a:extLst>
           </p:cNvPr>
@@ -4544,7 +4544,7 @@
             <a:hlinkClick r:id="" action="ppaction://media"/>
             <a:extLst>
               <a:ext uri="{FF2B5EF4-FFF2-40B4-BE49-F238E27FC236}">
-                <a16:creationId xmlns:a16="http://schemas.microsoft.com/office/drawing/2014/main" id="{993E6637-D1CD-46EB-CBD1-D31E2F8BB8A5}"/>
+                <a16:creationId xmlns:a16="http://schemas.microsoft.com/office/drawing/2014/main" id="{0F05988F-5BCE-322A-DEC2-ED1EE2913242}"/>
               </a:ext>
             </a:extLst>
           </p:cNvPr>
@@ -4579,7 +4579,7 @@
     </p:spTree>
     <p:extLst>
       <p:ext uri="{BB962C8B-B14F-4D97-AF65-F5344CB8AC3E}">
-        <p14:creationId xmlns:p14="http://schemas.microsoft.com/office/powerpoint/2010/main" val="1704231904"/>
+        <p14:creationId xmlns:p14="http://schemas.microsoft.com/office/powerpoint/2010/main" val="41668051"/>
       </p:ext>
     </p:extLst>
   </p:cSld>
@@ -4703,7 +4703,7 @@
           <p:cNvPr id="2" name="テキスト ボックス 1">
             <a:extLst>
               <a:ext uri="{FF2B5EF4-FFF2-40B4-BE49-F238E27FC236}">
-                <a16:creationId xmlns:a16="http://schemas.microsoft.com/office/drawing/2014/main" id="{D11C57A4-C471-4BC2-4A38-436C1CF63175}"/>
+                <a16:creationId xmlns:a16="http://schemas.microsoft.com/office/drawing/2014/main" id="{3538707F-097D-AF28-7C2C-EDE02283303A}"/>
               </a:ext>
             </a:extLst>
           </p:cNvPr>
@@ -4749,7 +4749,7 @@
           <p:cNvPr id="3" name="テキスト ボックス 2">
             <a:extLst>
               <a:ext uri="{FF2B5EF4-FFF2-40B4-BE49-F238E27FC236}">
-                <a16:creationId xmlns:a16="http://schemas.microsoft.com/office/drawing/2014/main" id="{F2EF7D0E-ED8B-3FA0-3B60-711FE324B6CF}"/>
+                <a16:creationId xmlns:a16="http://schemas.microsoft.com/office/drawing/2014/main" id="{B6F8EF3B-BA1D-CE19-B2C7-8E36616B9D78}"/>
               </a:ext>
             </a:extLst>
           </p:cNvPr>
@@ -4789,7 +4789,7 @@
           <p:cNvPr id="4" name="テキスト ボックス 3">
             <a:extLst>
               <a:ext uri="{FF2B5EF4-FFF2-40B4-BE49-F238E27FC236}">
-                <a16:creationId xmlns:a16="http://schemas.microsoft.com/office/drawing/2014/main" id="{A8162E56-F701-3813-2576-58CB73A42519}"/>
+                <a16:creationId xmlns:a16="http://schemas.microsoft.com/office/drawing/2014/main" id="{34DA1D36-B844-C6F5-59C2-9F0175ECD4EB}"/>
               </a:ext>
             </a:extLst>
           </p:cNvPr>
@@ -4899,7 +4899,7 @@
           <p:cNvPr id="5" name="テキスト ボックス 4">
             <a:extLst>
               <a:ext uri="{FF2B5EF4-FFF2-40B4-BE49-F238E27FC236}">
-                <a16:creationId xmlns:a16="http://schemas.microsoft.com/office/drawing/2014/main" id="{B1AD7040-7968-783C-1EA9-D3177ACADC97}"/>
+                <a16:creationId xmlns:a16="http://schemas.microsoft.com/office/drawing/2014/main" id="{BB9147A4-2591-CA58-A8E1-4424DD319F27}"/>
               </a:ext>
             </a:extLst>
           </p:cNvPr>
@@ -4946,7 +4946,7 @@
             <a:hlinkClick r:id="" action="ppaction://media"/>
             <a:extLst>
               <a:ext uri="{FF2B5EF4-FFF2-40B4-BE49-F238E27FC236}">
-                <a16:creationId xmlns:a16="http://schemas.microsoft.com/office/drawing/2014/main" id="{85487394-6E05-0EB0-AE47-7634399FE829}"/>
+                <a16:creationId xmlns:a16="http://schemas.microsoft.com/office/drawing/2014/main" id="{1E4E60B4-7E45-3BA9-7031-E43BE0C0E388}"/>
               </a:ext>
             </a:extLst>
           </p:cNvPr>
@@ -4981,7 +4981,7 @@
     </p:spTree>
     <p:extLst>
       <p:ext uri="{BB962C8B-B14F-4D97-AF65-F5344CB8AC3E}">
-        <p14:creationId xmlns:p14="http://schemas.microsoft.com/office/powerpoint/2010/main" val="2449313738"/>
+        <p14:creationId xmlns:p14="http://schemas.microsoft.com/office/powerpoint/2010/main" val="624189292"/>
       </p:ext>
     </p:extLst>
   </p:cSld>
@@ -5105,7 +5105,7 @@
           <p:cNvPr id="2" name="テキスト ボックス 1">
             <a:extLst>
               <a:ext uri="{FF2B5EF4-FFF2-40B4-BE49-F238E27FC236}">
-                <a16:creationId xmlns:a16="http://schemas.microsoft.com/office/drawing/2014/main" id="{F55F0E6D-8878-1B49-F8A7-ED598D715286}"/>
+                <a16:creationId xmlns:a16="http://schemas.microsoft.com/office/drawing/2014/main" id="{5FFF1BCA-5C86-E50F-2D76-0570EAFD45BE}"/>
               </a:ext>
             </a:extLst>
           </p:cNvPr>
@@ -5151,7 +5151,7 @@
           <p:cNvPr id="3" name="テキスト ボックス 2">
             <a:extLst>
               <a:ext uri="{FF2B5EF4-FFF2-40B4-BE49-F238E27FC236}">
-                <a16:creationId xmlns:a16="http://schemas.microsoft.com/office/drawing/2014/main" id="{2F8C83CD-B53C-9B34-7810-ACF7C8300A8E}"/>
+                <a16:creationId xmlns:a16="http://schemas.microsoft.com/office/drawing/2014/main" id="{44268291-A078-4F6F-E516-D1B25A03CC49}"/>
               </a:ext>
             </a:extLst>
           </p:cNvPr>
@@ -5191,7 +5191,7 @@
           <p:cNvPr id="4" name="テキスト ボックス 3">
             <a:extLst>
               <a:ext uri="{FF2B5EF4-FFF2-40B4-BE49-F238E27FC236}">
-                <a16:creationId xmlns:a16="http://schemas.microsoft.com/office/drawing/2014/main" id="{8D89FAB5-9807-4853-3657-5F8FB5FED24A}"/>
+                <a16:creationId xmlns:a16="http://schemas.microsoft.com/office/drawing/2014/main" id="{58D10303-2544-7B59-7E04-FF59FA8DB3B6}"/>
               </a:ext>
             </a:extLst>
           </p:cNvPr>
@@ -5215,20 +5215,14 @@
           <a:lstStyle/>
           <a:p>
             <a:r>
-              <a:rPr kumimoji="1" lang="en-US" altLang="ja-JP" sz="2000">
+              <a:rPr kumimoji="1" lang="ja-JP" altLang="en-US" sz="2000">
                 <a:solidFill>
                   <a:srgbClr val="333333"/>
                 </a:solidFill>
                 <a:latin typeface="Arial" panose="020B0604020202020204" pitchFamily="34" charset="0"/>
               </a:rPr>
-              <a:t>Set confirmed custom domain</a:t>
-            </a:r>
-            <a:endParaRPr kumimoji="1" lang="ja-JP" altLang="en-US" sz="2000">
-              <a:solidFill>
-                <a:srgbClr val="333333"/>
-              </a:solidFill>
-              <a:latin typeface="Arial" panose="020B0604020202020204" pitchFamily="34" charset="0"/>
-            </a:endParaRPr>
+              <a:t>直近のコミットでは、実装の見直しと継続的な改善が行われました。</a:t>
+            </a:r>
           </a:p>
         </p:txBody>
       </p:sp>
@@ -5237,7 +5231,7 @@
           <p:cNvPr id="5" name="テキスト ボックス 4">
             <a:extLst>
               <a:ext uri="{FF2B5EF4-FFF2-40B4-BE49-F238E27FC236}">
-                <a16:creationId xmlns:a16="http://schemas.microsoft.com/office/drawing/2014/main" id="{CC0F4EF3-F877-9EFE-F38A-18D441C1705C}"/>
+                <a16:creationId xmlns:a16="http://schemas.microsoft.com/office/drawing/2014/main" id="{A5BB6277-42E8-86CE-D802-5E3A11873694}"/>
               </a:ext>
             </a:extLst>
           </p:cNvPr>
@@ -5284,7 +5278,7 @@
             <a:hlinkClick r:id="" action="ppaction://media"/>
             <a:extLst>
               <a:ext uri="{FF2B5EF4-FFF2-40B4-BE49-F238E27FC236}">
-                <a16:creationId xmlns:a16="http://schemas.microsoft.com/office/drawing/2014/main" id="{7984DF71-3BE8-1BB7-F86E-2BD4A0AACD7D}"/>
+                <a16:creationId xmlns:a16="http://schemas.microsoft.com/office/drawing/2014/main" id="{E300809E-4AB5-DEDC-7D24-116ABA483574}"/>
               </a:ext>
             </a:extLst>
           </p:cNvPr>
@@ -5319,7 +5313,7 @@
     </p:spTree>
     <p:extLst>
       <p:ext uri="{BB962C8B-B14F-4D97-AF65-F5344CB8AC3E}">
-        <p14:creationId xmlns:p14="http://schemas.microsoft.com/office/powerpoint/2010/main" val="689550912"/>
+        <p14:creationId xmlns:p14="http://schemas.microsoft.com/office/powerpoint/2010/main" val="3571889601"/>
       </p:ext>
     </p:extLst>
   </p:cSld>
@@ -5362,7 +5356,7 @@
                                   <p:childTnLst>
                                     <p:cmd type="call" cmd="playFrom(0.0)">
                                       <p:cBhvr>
-                                        <p:cTn id="6" dur="6451" fill="hold"/>
+                                        <p:cTn id="6" dur="6076" fill="hold"/>
                                         <p:tgtEl>
                                           <p:spTgt spid="6"/>
                                         </p:tgtEl>
@@ -5443,7 +5437,7 @@
           <p:cNvPr id="2" name="テキスト ボックス 1">
             <a:extLst>
               <a:ext uri="{FF2B5EF4-FFF2-40B4-BE49-F238E27FC236}">
-                <a16:creationId xmlns:a16="http://schemas.microsoft.com/office/drawing/2014/main" id="{65B7C81D-9D80-C7F1-7CFF-FF6F5CA3E1C5}"/>
+                <a16:creationId xmlns:a16="http://schemas.microsoft.com/office/drawing/2014/main" id="{EED3E5D2-8DA0-8134-944C-DE4DC13AC069}"/>
               </a:ext>
             </a:extLst>
           </p:cNvPr>
@@ -5489,7 +5483,7 @@
           <p:cNvPr id="3" name="テキスト ボックス 2">
             <a:extLst>
               <a:ext uri="{FF2B5EF4-FFF2-40B4-BE49-F238E27FC236}">
-                <a16:creationId xmlns:a16="http://schemas.microsoft.com/office/drawing/2014/main" id="{DFB0AF25-8E63-FC82-D7BF-7F1E47904A8B}"/>
+                <a16:creationId xmlns:a16="http://schemas.microsoft.com/office/drawing/2014/main" id="{A7B1FB30-98AC-EF30-23A2-67216C15F283}"/>
               </a:ext>
             </a:extLst>
           </p:cNvPr>
@@ -5529,7 +5523,7 @@
           <p:cNvPr id="4" name="テキスト ボックス 3">
             <a:extLst>
               <a:ext uri="{FF2B5EF4-FFF2-40B4-BE49-F238E27FC236}">
-                <a16:creationId xmlns:a16="http://schemas.microsoft.com/office/drawing/2014/main" id="{9546C06F-5886-51A6-CBB0-3FBC927849F8}"/>
+                <a16:creationId xmlns:a16="http://schemas.microsoft.com/office/drawing/2014/main" id="{8B20FC0C-8852-E453-1985-EF15DC67764F}"/>
               </a:ext>
             </a:extLst>
           </p:cNvPr>
@@ -5594,7 +5588,7 @@
           <p:cNvPr id="5" name="テキスト ボックス 4">
             <a:extLst>
               <a:ext uri="{FF2B5EF4-FFF2-40B4-BE49-F238E27FC236}">
-                <a16:creationId xmlns:a16="http://schemas.microsoft.com/office/drawing/2014/main" id="{19B6AB43-9540-1AF3-26E3-58F404F7D506}"/>
+                <a16:creationId xmlns:a16="http://schemas.microsoft.com/office/drawing/2014/main" id="{03968060-F258-5DF2-CFF1-63FF911D2FE7}"/>
               </a:ext>
             </a:extLst>
           </p:cNvPr>
@@ -5641,7 +5635,7 @@
             <a:hlinkClick r:id="" action="ppaction://media"/>
             <a:extLst>
               <a:ext uri="{FF2B5EF4-FFF2-40B4-BE49-F238E27FC236}">
-                <a16:creationId xmlns:a16="http://schemas.microsoft.com/office/drawing/2014/main" id="{78BE397B-D86F-B5FE-9953-D534ABE4BB37}"/>
+                <a16:creationId xmlns:a16="http://schemas.microsoft.com/office/drawing/2014/main" id="{5D7F878C-5BF7-1673-1F65-188560092BBA}"/>
               </a:ext>
             </a:extLst>
           </p:cNvPr>
@@ -5676,7 +5670,7 @@
     </p:spTree>
     <p:extLst>
       <p:ext uri="{BB962C8B-B14F-4D97-AF65-F5344CB8AC3E}">
-        <p14:creationId xmlns:p14="http://schemas.microsoft.com/office/powerpoint/2010/main" val="2482756809"/>
+        <p14:creationId xmlns:p14="http://schemas.microsoft.com/office/powerpoint/2010/main" val="1351498387"/>
       </p:ext>
     </p:extLst>
   </p:cSld>
